--- a/content/02-workshop/slides.pptx
+++ b/content/02-workshop/slides.pptx
@@ -11,6 +11,12 @@
     <p:sldId id="259" r:id="rId10"/>
     <p:sldId id="260" r:id="rId11"/>
     <p:sldId id="261" r:id="rId12"/>
+    <p:sldId id="262" r:id="rId13"/>
+    <p:sldId id="263" r:id="rId14"/>
+    <p:sldId id="264" r:id="rId15"/>
+    <p:sldId id="265" r:id="rId16"/>
+    <p:sldId id="266" r:id="rId17"/>
+    <p:sldId id="267" r:id="rId18"/>
   </p:sldIdLst>
   <p:sldSz cx="12191695" cy="6858000" type="screen4x3"/>
   <p:notesSz cx="6858000" cy="9144000"/>
@@ -3240,7 +3246,7 @@
 </p:sld>
 </file>
 
-<file path=ppt/slides/slide2.xml><?xml version="1.0" encoding="utf-8"?>
+<file path=ppt/slides/slide10.xml><?xml version="1.0" encoding="utf-8"?>
 <p:sld xmlns:a="http://schemas.openxmlformats.org/drawingml/2006/main" xmlns:p="http://schemas.openxmlformats.org/presentationml/2006/main" xmlns:r="http://schemas.openxmlformats.org/officeDocument/2006/relationships">
   <p:cSld>
     <p:spTree>
@@ -3330,7 +3336,7 @@
                 <a:ea typeface="Hiragino Kaku Gothic Pro"/>
                 <a:cs typeface="Hiragino Kaku Gothic Pro"/>
               </a:rPr>
-              <a:t>今日の実例</a:t>
+              <a:t>原則③</a:t>
             </a:r>
           </a:p>
         </p:txBody>
@@ -3371,7 +3377,7 @@
                 <a:ea typeface="Hiragino Kaku Gothic Pro"/>
                 <a:cs typeface="Hiragino Kaku Gothic Pro"/>
               </a:rPr>
-              <a:t>JARMeC×キャミック 遠隔読影ワークショップ（第10回）</a:t>
+              <a:t>AIに整理させ、人は「削る・判断する」</a:t>
             </a:r>
           </a:p>
         </p:txBody>
@@ -3412,7 +3418,7 @@
                 <a:ea typeface="Hiragino Kaku Gothic Pro"/>
                 <a:cs typeface="Hiragino Kaku Gothic Pro"/>
               </a:rPr>
-              <a:t>・遠隔読影の運用・例外処理・レポート入力の設計を議論</a:t>
+              <a:t>・生の議事メモを、まずAIに渡して構造化させる</a:t>
             </a:r>
           </a:p>
           <a:p>
@@ -3430,7 +3436,7 @@
                 <a:ea typeface="Hiragino Kaku Gothic Pro"/>
                 <a:cs typeface="Hiragino Kaku Gothic Pro"/>
               </a:rPr>
-              <a:t>・曖昧なままだった運用を、その場で「構造」に落とした</a:t>
+              <a:t>・人は、要らない所を削り、重要な判断をする</a:t>
             </a:r>
           </a:p>
           <a:p>
@@ -3448,7 +3454,688 @@
                 <a:ea typeface="Hiragino Kaku Gothic Pro"/>
                 <a:cs typeface="Hiragino Kaku Gothic Pro"/>
               </a:rPr>
-              <a:t>・決めたことは、その日のうちにチームへ共有した</a:t>
+              <a:t>・「完璧な記録」ではなく「次に動ける要点」に寄せる</a:t>
+            </a:r>
+          </a:p>
+        </p:txBody>
+      </p:sp>
+    </p:spTree>
+  </p:cSld>
+  <p:clrMapOvr>
+    <a:masterClrMapping/>
+  </p:clrMapOvr>
+</p:sld>
+</file>
+
+<file path=ppt/slides/slide11.xml><?xml version="1.0" encoding="utf-8"?>
+<p:sld xmlns:a="http://schemas.openxmlformats.org/drawingml/2006/main" xmlns:p="http://schemas.openxmlformats.org/presentationml/2006/main" xmlns:r="http://schemas.openxmlformats.org/officeDocument/2006/relationships">
+  <p:cSld>
+    <p:spTree>
+      <p:nvGrpSpPr>
+        <p:cNvPr id="1" name=""/>
+        <p:cNvGrpSpPr/>
+        <p:nvPr/>
+      </p:nvGrpSpPr>
+      <p:grpSpPr/>
+      <p:sp>
+        <p:nvSpPr>
+          <p:cNvPr id="2" name="Rectangle 1"/>
+          <p:cNvSpPr/>
+          <p:nvPr/>
+        </p:nvSpPr>
+        <p:spPr>
+          <a:xfrm>
+            <a:off x="0" y="0"/>
+            <a:ext cx="12191695" cy="6858000"/>
+          </a:xfrm>
+          <a:prstGeom prst="rect">
+            <a:avLst/>
+          </a:prstGeom>
+          <a:solidFill>
+            <a:srgbClr val="141414"/>
+          </a:solidFill>
+          <a:ln>
+            <a:noFill/>
+          </a:ln>
+          <a:effectLst/>
+        </p:spPr>
+        <p:style>
+          <a:lnRef idx="1">
+            <a:schemeClr val="accent1"/>
+          </a:lnRef>
+          <a:fillRef idx="3">
+            <a:schemeClr val="accent1"/>
+          </a:fillRef>
+          <a:effectRef idx="2">
+            <a:schemeClr val="accent1"/>
+          </a:effectRef>
+          <a:fontRef idx="minor">
+            <a:schemeClr val="lt1"/>
+          </a:fontRef>
+        </p:style>
+        <p:txBody>
+          <a:bodyPr rtlCol="0" anchor="ctr"/>
+          <a:lstStyle/>
+          <a:p>
+            <a:pPr algn="ctr"/>
+          </a:p>
+        </p:txBody>
+      </p:sp>
+      <p:sp>
+        <p:nvSpPr>
+          <p:cNvPr id="3" name="TextBox 2"/>
+          <p:cNvSpPr txBox="1"/>
+          <p:nvPr/>
+        </p:nvSpPr>
+        <p:spPr>
+          <a:xfrm>
+            <a:off x="822960" y="640080"/>
+            <a:ext cx="7315200" cy="548640"/>
+          </a:xfrm>
+          <a:prstGeom prst="rect">
+            <a:avLst/>
+          </a:prstGeom>
+          <a:noFill/>
+        </p:spPr>
+        <p:txBody>
+          <a:bodyPr wrap="square">
+            <a:spAutoFit/>
+          </a:bodyPr>
+          <a:lstStyle/>
+          <a:p>
+            <a:pPr algn="l">
+              <a:spcAft>
+                <a:spcPts val="800"/>
+              </a:spcAft>
+            </a:pPr>
+            <a:r>
+              <a:rPr sz="2000" b="1">
+                <a:solidFill>
+                  <a:srgbClr val="E87A3E"/>
+                </a:solidFill>
+                <a:latin typeface="Hiragino Kaku Gothic Pro"/>
+                <a:ea typeface="Hiragino Kaku Gothic Pro"/>
+                <a:cs typeface="Hiragino Kaku Gothic Pro"/>
+              </a:rPr>
+              <a:t>明日からの手順</a:t>
+            </a:r>
+          </a:p>
+        </p:txBody>
+      </p:sp>
+      <p:sp>
+        <p:nvSpPr>
+          <p:cNvPr id="4" name="TextBox 3"/>
+          <p:cNvSpPr txBox="1"/>
+          <p:nvPr/>
+        </p:nvSpPr>
+        <p:spPr>
+          <a:xfrm>
+            <a:off x="822960" y="1280160"/>
+            <a:ext cx="10607040" cy="1645920"/>
+          </a:xfrm>
+          <a:prstGeom prst="rect">
+            <a:avLst/>
+          </a:prstGeom>
+          <a:noFill/>
+        </p:spPr>
+        <p:txBody>
+          <a:bodyPr wrap="square">
+            <a:spAutoFit/>
+          </a:bodyPr>
+          <a:lstStyle/>
+          <a:p>
+            <a:pPr algn="l">
+              <a:spcAft>
+                <a:spcPts val="800"/>
+              </a:spcAft>
+            </a:pPr>
+            <a:r>
+              <a:rPr sz="3800" b="1">
+                <a:solidFill>
+                  <a:srgbClr val="F5F3F0"/>
+                </a:solidFill>
+                <a:latin typeface="Hiragino Kaku Gothic Pro"/>
+                <a:ea typeface="Hiragino Kaku Gothic Pro"/>
+                <a:cs typeface="Hiragino Kaku Gothic Pro"/>
+              </a:rPr>
+              <a:t>この型を、自分の会議で回す</a:t>
+            </a:r>
+          </a:p>
+        </p:txBody>
+      </p:sp>
+      <p:sp>
+        <p:nvSpPr>
+          <p:cNvPr id="5" name="TextBox 4"/>
+          <p:cNvSpPr txBox="1"/>
+          <p:nvPr/>
+        </p:nvSpPr>
+        <p:spPr>
+          <a:xfrm>
+            <a:off x="914400" y="3017520"/>
+            <a:ext cx="10424160" cy="3291840"/>
+          </a:xfrm>
+          <a:prstGeom prst="rect">
+            <a:avLst/>
+          </a:prstGeom>
+          <a:noFill/>
+        </p:spPr>
+        <p:txBody>
+          <a:bodyPr wrap="square">
+            <a:spAutoFit/>
+          </a:bodyPr>
+          <a:lstStyle/>
+          <a:p>
+            <a:pPr algn="l">
+              <a:spcAft>
+                <a:spcPts val="1400"/>
+              </a:spcAft>
+            </a:pPr>
+            <a:r>
+              <a:rPr sz="2300" b="0">
+                <a:solidFill>
+                  <a:srgbClr val="F5F3F0"/>
+                </a:solidFill>
+                <a:latin typeface="Hiragino Kaku Gothic Pro"/>
+                <a:ea typeface="Hiragino Kaku Gothic Pro"/>
+                <a:cs typeface="Hiragino Kaku Gothic Pro"/>
+              </a:rPr>
+              <a:t>・① まず現場・論点をよく観察する</a:t>
+            </a:r>
+          </a:p>
+          <a:p>
+            <a:pPr algn="l">
+              <a:spcAft>
+                <a:spcPts val="1400"/>
+              </a:spcAft>
+            </a:pPr>
+            <a:r>
+              <a:rPr sz="2300" b="0">
+                <a:solidFill>
+                  <a:srgbClr val="F5F3F0"/>
+                </a:solidFill>
+                <a:latin typeface="Hiragino Kaku Gothic Pro"/>
+                <a:ea typeface="Hiragino Kaku Gothic Pro"/>
+                <a:cs typeface="Hiragino Kaku Gothic Pro"/>
+              </a:rPr>
+              <a:t>・② レーン／階層で構造化する</a:t>
+            </a:r>
+          </a:p>
+          <a:p>
+            <a:pPr algn="l">
+              <a:spcAft>
+                <a:spcPts val="1400"/>
+              </a:spcAft>
+            </a:pPr>
+            <a:r>
+              <a:rPr sz="2300" b="0">
+                <a:solidFill>
+                  <a:srgbClr val="F5F3F0"/>
+                </a:solidFill>
+                <a:latin typeface="Hiragino Kaku Gothic Pro"/>
+                <a:ea typeface="Hiragino Kaku Gothic Pro"/>
+                <a:cs typeface="Hiragino Kaku Gothic Pro"/>
+              </a:rPr>
+              <a:t>・③ 決定・未決・次アクションに分ける</a:t>
+            </a:r>
+          </a:p>
+          <a:p>
+            <a:pPr algn="l">
+              <a:spcAft>
+                <a:spcPts val="1400"/>
+              </a:spcAft>
+            </a:pPr>
+            <a:r>
+              <a:rPr sz="2300" b="0">
+                <a:solidFill>
+                  <a:srgbClr val="F5F3F0"/>
+                </a:solidFill>
+                <a:latin typeface="Hiragino Kaku Gothic Pro"/>
+                <a:ea typeface="Hiragino Kaku Gothic Pro"/>
+                <a:cs typeface="Hiragino Kaku Gothic Pro"/>
+              </a:rPr>
+              <a:t>・④ その日のうちに共有する</a:t>
+            </a:r>
+          </a:p>
+        </p:txBody>
+      </p:sp>
+    </p:spTree>
+  </p:cSld>
+  <p:clrMapOvr>
+    <a:masterClrMapping/>
+  </p:clrMapOvr>
+</p:sld>
+</file>
+
+<file path=ppt/slides/slide12.xml><?xml version="1.0" encoding="utf-8"?>
+<p:sld xmlns:a="http://schemas.openxmlformats.org/drawingml/2006/main" xmlns:p="http://schemas.openxmlformats.org/presentationml/2006/main" xmlns:r="http://schemas.openxmlformats.org/officeDocument/2006/relationships">
+  <p:cSld>
+    <p:spTree>
+      <p:nvGrpSpPr>
+        <p:cNvPr id="1" name=""/>
+        <p:cNvGrpSpPr/>
+        <p:nvPr/>
+      </p:nvGrpSpPr>
+      <p:grpSpPr/>
+      <p:sp>
+        <p:nvSpPr>
+          <p:cNvPr id="2" name="Rectangle 1"/>
+          <p:cNvSpPr/>
+          <p:nvPr/>
+        </p:nvSpPr>
+        <p:spPr>
+          <a:xfrm>
+            <a:off x="0" y="0"/>
+            <a:ext cx="12191695" cy="6858000"/>
+          </a:xfrm>
+          <a:prstGeom prst="rect">
+            <a:avLst/>
+          </a:prstGeom>
+          <a:solidFill>
+            <a:srgbClr val="1E1711"/>
+          </a:solidFill>
+          <a:ln>
+            <a:noFill/>
+          </a:ln>
+          <a:effectLst/>
+        </p:spPr>
+        <p:style>
+          <a:lnRef idx="1">
+            <a:schemeClr val="accent1"/>
+          </a:lnRef>
+          <a:fillRef idx="3">
+            <a:schemeClr val="accent1"/>
+          </a:fillRef>
+          <a:effectRef idx="2">
+            <a:schemeClr val="accent1"/>
+          </a:effectRef>
+          <a:fontRef idx="minor">
+            <a:schemeClr val="lt1"/>
+          </a:fontRef>
+        </p:style>
+        <p:txBody>
+          <a:bodyPr rtlCol="0" anchor="ctr"/>
+          <a:lstStyle/>
+          <a:p>
+            <a:pPr algn="ctr"/>
+          </a:p>
+        </p:txBody>
+      </p:sp>
+      <p:sp>
+        <p:nvSpPr>
+          <p:cNvPr id="3" name="TextBox 2"/>
+          <p:cNvSpPr txBox="1"/>
+          <p:nvPr/>
+        </p:nvSpPr>
+        <p:spPr>
+          <a:xfrm>
+            <a:off x="822960" y="640080"/>
+            <a:ext cx="7315200" cy="548640"/>
+          </a:xfrm>
+          <a:prstGeom prst="rect">
+            <a:avLst/>
+          </a:prstGeom>
+          <a:noFill/>
+        </p:spPr>
+        <p:txBody>
+          <a:bodyPr wrap="square">
+            <a:spAutoFit/>
+          </a:bodyPr>
+          <a:lstStyle/>
+          <a:p>
+            <a:pPr algn="l">
+              <a:spcAft>
+                <a:spcPts val="800"/>
+              </a:spcAft>
+            </a:pPr>
+            <a:r>
+              <a:rPr sz="2000" b="1">
+                <a:solidFill>
+                  <a:srgbClr val="E87A3E"/>
+                </a:solidFill>
+                <a:latin typeface="Hiragino Kaku Gothic Pro"/>
+                <a:ea typeface="Hiragino Kaku Gothic Pro"/>
+                <a:cs typeface="Hiragino Kaku Gothic Pro"/>
+              </a:rPr>
+              <a:t>新人へ、これだけは</a:t>
+            </a:r>
+          </a:p>
+        </p:txBody>
+      </p:sp>
+      <p:sp>
+        <p:nvSpPr>
+          <p:cNvPr id="4" name="TextBox 3"/>
+          <p:cNvSpPr txBox="1"/>
+          <p:nvPr/>
+        </p:nvSpPr>
+        <p:spPr>
+          <a:xfrm>
+            <a:off x="822960" y="1280160"/>
+            <a:ext cx="10607040" cy="1645920"/>
+          </a:xfrm>
+          <a:prstGeom prst="rect">
+            <a:avLst/>
+          </a:prstGeom>
+          <a:noFill/>
+        </p:spPr>
+        <p:txBody>
+          <a:bodyPr wrap="square">
+            <a:spAutoFit/>
+          </a:bodyPr>
+          <a:lstStyle/>
+          <a:p>
+            <a:pPr algn="l">
+              <a:spcAft>
+                <a:spcPts val="800"/>
+              </a:spcAft>
+            </a:pPr>
+            <a:r>
+              <a:rPr sz="3200" b="1">
+                <a:solidFill>
+                  <a:srgbClr val="F5F3F0"/>
+                </a:solidFill>
+                <a:latin typeface="Hiragino Kaku Gothic Pro"/>
+                <a:ea typeface="Hiragino Kaku Gothic Pro"/>
+                <a:cs typeface="Hiragino Kaku Gothic Pro"/>
+              </a:rPr>
+              <a:t>会議の成果は「議事録」ではなく「次に動ける状態」</a:t>
+            </a:r>
+          </a:p>
+        </p:txBody>
+      </p:sp>
+      <p:sp>
+        <p:nvSpPr>
+          <p:cNvPr id="5" name="TextBox 4"/>
+          <p:cNvSpPr txBox="1"/>
+          <p:nvPr/>
+        </p:nvSpPr>
+        <p:spPr>
+          <a:xfrm>
+            <a:off x="914400" y="3108960"/>
+            <a:ext cx="10424160" cy="3291840"/>
+          </a:xfrm>
+          <a:prstGeom prst="rect">
+            <a:avLst/>
+          </a:prstGeom>
+          <a:noFill/>
+        </p:spPr>
+        <p:txBody>
+          <a:bodyPr wrap="square">
+            <a:spAutoFit/>
+          </a:bodyPr>
+          <a:lstStyle/>
+          <a:p>
+            <a:pPr algn="l">
+              <a:spcAft>
+                <a:spcPts val="1400"/>
+              </a:spcAft>
+            </a:pPr>
+            <a:r>
+              <a:rPr sz="2300" b="0">
+                <a:solidFill>
+                  <a:srgbClr val="F5F3F0"/>
+                </a:solidFill>
+                <a:latin typeface="Hiragino Kaku Gothic Pro"/>
+                <a:ea typeface="Hiragino Kaku Gothic Pro"/>
+                <a:cs typeface="Hiragino Kaku Gothic Pro"/>
+              </a:rPr>
+              <a:t>・出て終わりにしない。翌日の意思決定を作る</a:t>
+            </a:r>
+          </a:p>
+          <a:p>
+            <a:pPr algn="l">
+              <a:spcAft>
+                <a:spcPts val="1400"/>
+              </a:spcAft>
+            </a:pPr>
+            <a:r>
+              <a:rPr sz="2300" b="0">
+                <a:solidFill>
+                  <a:srgbClr val="F5F3F0"/>
+                </a:solidFill>
+                <a:latin typeface="Hiragino Kaku Gothic Pro"/>
+                <a:ea typeface="Hiragino Kaku Gothic Pro"/>
+                <a:cs typeface="Hiragino Kaku Gothic Pro"/>
+              </a:rPr>
+              <a:t>・曖昧な業務は、レーン・階層に分けて構造化する</a:t>
+            </a:r>
+          </a:p>
+          <a:p>
+            <a:pPr algn="l">
+              <a:spcAft>
+                <a:spcPts val="1400"/>
+              </a:spcAft>
+            </a:pPr>
+            <a:r>
+              <a:rPr sz="2300" b="0">
+                <a:solidFill>
+                  <a:srgbClr val="F5F3F0"/>
+                </a:solidFill>
+                <a:latin typeface="Hiragino Kaku Gothic Pro"/>
+                <a:ea typeface="Hiragino Kaku Gothic Pro"/>
+                <a:cs typeface="Hiragino Kaku Gothic Pro"/>
+              </a:rPr>
+              <a:t>・決定・未決・次アクションを分けて、その日に共有する</a:t>
+            </a:r>
+          </a:p>
+        </p:txBody>
+      </p:sp>
+    </p:spTree>
+  </p:cSld>
+  <p:clrMapOvr>
+    <a:masterClrMapping/>
+  </p:clrMapOvr>
+</p:sld>
+</file>
+
+<file path=ppt/slides/slide2.xml><?xml version="1.0" encoding="utf-8"?>
+<p:sld xmlns:a="http://schemas.openxmlformats.org/drawingml/2006/main" xmlns:p="http://schemas.openxmlformats.org/presentationml/2006/main" xmlns:r="http://schemas.openxmlformats.org/officeDocument/2006/relationships">
+  <p:cSld>
+    <p:spTree>
+      <p:nvGrpSpPr>
+        <p:cNvPr id="1" name=""/>
+        <p:cNvGrpSpPr/>
+        <p:nvPr/>
+      </p:nvGrpSpPr>
+      <p:grpSpPr/>
+      <p:sp>
+        <p:nvSpPr>
+          <p:cNvPr id="2" name="Rectangle 1"/>
+          <p:cNvSpPr/>
+          <p:nvPr/>
+        </p:nvSpPr>
+        <p:spPr>
+          <a:xfrm>
+            <a:off x="0" y="0"/>
+            <a:ext cx="12191695" cy="6858000"/>
+          </a:xfrm>
+          <a:prstGeom prst="rect">
+            <a:avLst/>
+          </a:prstGeom>
+          <a:solidFill>
+            <a:srgbClr val="141414"/>
+          </a:solidFill>
+          <a:ln>
+            <a:noFill/>
+          </a:ln>
+          <a:effectLst/>
+        </p:spPr>
+        <p:style>
+          <a:lnRef idx="1">
+            <a:schemeClr val="accent1"/>
+          </a:lnRef>
+          <a:fillRef idx="3">
+            <a:schemeClr val="accent1"/>
+          </a:fillRef>
+          <a:effectRef idx="2">
+            <a:schemeClr val="accent1"/>
+          </a:effectRef>
+          <a:fontRef idx="minor">
+            <a:schemeClr val="lt1"/>
+          </a:fontRef>
+        </p:style>
+        <p:txBody>
+          <a:bodyPr rtlCol="0" anchor="ctr"/>
+          <a:lstStyle/>
+          <a:p>
+            <a:pPr algn="ctr"/>
+          </a:p>
+        </p:txBody>
+      </p:sp>
+      <p:sp>
+        <p:nvSpPr>
+          <p:cNvPr id="3" name="TextBox 2"/>
+          <p:cNvSpPr txBox="1"/>
+          <p:nvPr/>
+        </p:nvSpPr>
+        <p:spPr>
+          <a:xfrm>
+            <a:off x="822960" y="640080"/>
+            <a:ext cx="7315200" cy="548640"/>
+          </a:xfrm>
+          <a:prstGeom prst="rect">
+            <a:avLst/>
+          </a:prstGeom>
+          <a:noFill/>
+        </p:spPr>
+        <p:txBody>
+          <a:bodyPr wrap="square">
+            <a:spAutoFit/>
+          </a:bodyPr>
+          <a:lstStyle/>
+          <a:p>
+            <a:pPr algn="l">
+              <a:spcAft>
+                <a:spcPts val="800"/>
+              </a:spcAft>
+            </a:pPr>
+            <a:r>
+              <a:rPr sz="2000" b="1">
+                <a:solidFill>
+                  <a:srgbClr val="E87A3E"/>
+                </a:solidFill>
+                <a:latin typeface="Hiragino Kaku Gothic Pro"/>
+                <a:ea typeface="Hiragino Kaku Gothic Pro"/>
+                <a:cs typeface="Hiragino Kaku Gothic Pro"/>
+              </a:rPr>
+              <a:t>まず、よくある失敗</a:t>
+            </a:r>
+          </a:p>
+        </p:txBody>
+      </p:sp>
+      <p:sp>
+        <p:nvSpPr>
+          <p:cNvPr id="4" name="TextBox 3"/>
+          <p:cNvSpPr txBox="1"/>
+          <p:nvPr/>
+        </p:nvSpPr>
+        <p:spPr>
+          <a:xfrm>
+            <a:off x="822960" y="1280160"/>
+            <a:ext cx="10607040" cy="1645920"/>
+          </a:xfrm>
+          <a:prstGeom prst="rect">
+            <a:avLst/>
+          </a:prstGeom>
+          <a:noFill/>
+        </p:spPr>
+        <p:txBody>
+          <a:bodyPr wrap="square">
+            <a:spAutoFit/>
+          </a:bodyPr>
+          <a:lstStyle/>
+          <a:p>
+            <a:pPr algn="l">
+              <a:spcAft>
+                <a:spcPts val="800"/>
+              </a:spcAft>
+            </a:pPr>
+            <a:r>
+              <a:rPr sz="3800" b="1">
+                <a:solidFill>
+                  <a:srgbClr val="F5F3F0"/>
+                </a:solidFill>
+                <a:latin typeface="Hiragino Kaku Gothic Pro"/>
+                <a:ea typeface="Hiragino Kaku Gothic Pro"/>
+                <a:cs typeface="Hiragino Kaku Gothic Pro"/>
+              </a:rPr>
+              <a:t>会議が「出て終わり」になっていないか</a:t>
+            </a:r>
+          </a:p>
+        </p:txBody>
+      </p:sp>
+      <p:sp>
+        <p:nvSpPr>
+          <p:cNvPr id="5" name="TextBox 4"/>
+          <p:cNvSpPr txBox="1"/>
+          <p:nvPr/>
+        </p:nvSpPr>
+        <p:spPr>
+          <a:xfrm>
+            <a:off x="914400" y="3017520"/>
+            <a:ext cx="10424160" cy="3291840"/>
+          </a:xfrm>
+          <a:prstGeom prst="rect">
+            <a:avLst/>
+          </a:prstGeom>
+          <a:noFill/>
+        </p:spPr>
+        <p:txBody>
+          <a:bodyPr wrap="square">
+            <a:spAutoFit/>
+          </a:bodyPr>
+          <a:lstStyle/>
+          <a:p>
+            <a:pPr algn="l">
+              <a:spcAft>
+                <a:spcPts val="1400"/>
+              </a:spcAft>
+            </a:pPr>
+            <a:r>
+              <a:rPr sz="2300" b="0">
+                <a:solidFill>
+                  <a:srgbClr val="F5F3F0"/>
+                </a:solidFill>
+                <a:latin typeface="Hiragino Kaku Gothic Pro"/>
+                <a:ea typeface="Hiragino Kaku Gothic Pro"/>
+                <a:cs typeface="Hiragino Kaku Gothic Pro"/>
+              </a:rPr>
+              <a:t>・議事録は残るのに、翌日、誰も動いていない</a:t>
+            </a:r>
+          </a:p>
+          <a:p>
+            <a:pPr algn="l">
+              <a:spcAft>
+                <a:spcPts val="1400"/>
+              </a:spcAft>
+            </a:pPr>
+            <a:r>
+              <a:rPr sz="2300" b="0">
+                <a:solidFill>
+                  <a:srgbClr val="F5F3F0"/>
+                </a:solidFill>
+                <a:latin typeface="Hiragino Kaku Gothic Pro"/>
+                <a:ea typeface="Hiragino Kaku Gothic Pro"/>
+                <a:cs typeface="Hiragino Kaku Gothic Pro"/>
+              </a:rPr>
+              <a:t>・「決めたつもり」で、実は何も決まっていない</a:t>
+            </a:r>
+          </a:p>
+          <a:p>
+            <a:pPr algn="l">
+              <a:spcAft>
+                <a:spcPts val="1400"/>
+              </a:spcAft>
+            </a:pPr>
+            <a:r>
+              <a:rPr sz="2300" b="0">
+                <a:solidFill>
+                  <a:srgbClr val="F5F3F0"/>
+                </a:solidFill>
+                <a:latin typeface="Hiragino Kaku Gothic Pro"/>
+                <a:ea typeface="Hiragino Kaku Gothic Pro"/>
+                <a:cs typeface="Hiragino Kaku Gothic Pro"/>
+              </a:rPr>
+              <a:t>・次の会議でまた「で、結局どうする？」が繰り返される</a:t>
             </a:r>
           </a:p>
         </p:txBody>
@@ -3551,7 +4238,7 @@
                 <a:ea typeface="Hiragino Kaku Gothic Pro"/>
                 <a:cs typeface="Hiragino Kaku Gothic Pro"/>
               </a:rPr>
-              <a:t>原則①</a:t>
+              <a:t>今日の実例</a:t>
             </a:r>
           </a:p>
         </p:txBody>
@@ -3592,7 +4279,7 @@
                 <a:ea typeface="Hiragino Kaku Gothic Pro"/>
                 <a:cs typeface="Hiragino Kaku Gothic Pro"/>
               </a:rPr>
-              <a:t>曖昧な運用は「レーン / 階層」で構造化する</a:t>
+              <a:t>JARMeC×キャミック 遠隔読影ワークショップ（第10回）</a:t>
             </a:r>
           </a:p>
         </p:txBody>
@@ -3633,7 +4320,7 @@
                 <a:ea typeface="Hiragino Kaku Gothic Pro"/>
                 <a:cs typeface="Hiragino Kaku Gothic Pro"/>
               </a:rPr>
-              <a:t>・例外処理は3レーンに：緊急・急ぎ / 情報不足 / 想定外の所見</a:t>
+              <a:t>・動物病院の「遠隔読影」を、新システムでどう回すかを設計する会</a:t>
             </a:r>
           </a:p>
           <a:p>
@@ -3651,7 +4338,7 @@
                 <a:ea typeface="Hiragino Kaku Gothic Pro"/>
                 <a:cs typeface="Hiragino Kaku Gothic Pro"/>
               </a:rPr>
-              <a:t>・レポート入力は3階層に：自動入力 / 選択・定型文 / 自由記載</a:t>
+              <a:t>・論点は、運用ルール・例外処理・レポートの入力方法</a:t>
             </a:r>
           </a:p>
           <a:p>
@@ -3669,7 +4356,7 @@
                 <a:ea typeface="Hiragino Kaku Gothic Pro"/>
                 <a:cs typeface="Hiragino Kaku Gothic Pro"/>
               </a:rPr>
-              <a:t>・「分類（レーン）」や「段階（階層）」に分けると、一気に決まる</a:t>
+              <a:t>・ここが曖昧なままだと、システム実装で必ず詰まる</a:t>
             </a:r>
           </a:p>
         </p:txBody>
@@ -3772,7 +4459,7 @@
                 <a:ea typeface="Hiragino Kaku Gothic Pro"/>
                 <a:cs typeface="Hiragino Kaku Gothic Pro"/>
               </a:rPr>
-              <a:t>原則②</a:t>
+              <a:t>今日の流れ</a:t>
             </a:r>
           </a:p>
         </p:txBody>
@@ -3813,7 +4500,7 @@
                 <a:ea typeface="Hiragino Kaku Gothic Pro"/>
                 <a:cs typeface="Hiragino Kaku Gothic Pro"/>
               </a:rPr>
-              <a:t>決定・未決・次アクションを分けて、即共有する</a:t>
+              <a:t>おぼえてほしいのは、3つの原則</a:t>
             </a:r>
           </a:p>
         </p:txBody>
@@ -3854,7 +4541,7 @@
                 <a:ea typeface="Hiragino Kaku Gothic Pro"/>
                 <a:cs typeface="Hiragino Kaku Gothic Pro"/>
               </a:rPr>
-              <a:t>・決まったこと / まだ決まっていないこと / 次にやること を分ける</a:t>
+              <a:t>・原則① 曖昧な運用は「構造」に落とす</a:t>
             </a:r>
           </a:p>
           <a:p>
@@ -3872,7 +4559,7 @@
                 <a:ea typeface="Hiragino Kaku Gothic Pro"/>
                 <a:cs typeface="Hiragino Kaku Gothic Pro"/>
               </a:rPr>
-              <a:t>・その日のうちに共有する（鮮度が価値）</a:t>
+              <a:t>・原則② 決定・未決・次アクションを分ける</a:t>
             </a:r>
           </a:p>
           <a:p>
@@ -3890,7 +4577,7 @@
                 <a:ea typeface="Hiragino Kaku Gothic Pro"/>
                 <a:cs typeface="Hiragino Kaku Gothic Pro"/>
               </a:rPr>
-              <a:t>・分けるだけで、翌日から「誰が何をやるか」が明確になる</a:t>
+              <a:t>・原則③ AIに整理させ、人は「削る・判断する」</a:t>
             </a:r>
           </a:p>
         </p:txBody>
@@ -3993,7 +4680,7 @@
                 <a:ea typeface="Hiragino Kaku Gothic Pro"/>
                 <a:cs typeface="Hiragino Kaku Gothic Pro"/>
               </a:rPr>
-              <a:t>原則③</a:t>
+              <a:t>原則① ― その1</a:t>
             </a:r>
           </a:p>
         </p:txBody>
@@ -4034,7 +4721,7 @@
                 <a:ea typeface="Hiragino Kaku Gothic Pro"/>
                 <a:cs typeface="Hiragino Kaku Gothic Pro"/>
               </a:rPr>
-              <a:t>AIに整理させ、人は「要らない所を削る」</a:t>
+              <a:t>曖昧な運用は「レーン」で分ける</a:t>
             </a:r>
           </a:p>
         </p:txBody>
@@ -4075,7 +4762,7 @@
                 <a:ea typeface="Hiragino Kaku Gothic Pro"/>
                 <a:cs typeface="Hiragino Kaku Gothic Pro"/>
               </a:rPr>
-              <a:t>・生の議事メモをAIに渡して、まず構造化させる</a:t>
+              <a:t>・遠隔読影の例外を、3つのレーンに分けた</a:t>
             </a:r>
           </a:p>
           <a:p>
@@ -4093,7 +4780,7 @@
                 <a:ea typeface="Hiragino Kaku Gothic Pro"/>
                 <a:cs typeface="Hiragino Kaku Gothic Pro"/>
               </a:rPr>
-              <a:t>・人は、要らない所を削る・判断する に集中する</a:t>
+              <a:t>・①緊急・急ぎ　②情報不足　③想定外の所見</a:t>
             </a:r>
           </a:p>
           <a:p>
@@ -4111,7 +4798,7 @@
                 <a:ea typeface="Hiragino Kaku Gothic Pro"/>
                 <a:cs typeface="Hiragino Kaku Gothic Pro"/>
               </a:rPr>
-              <a:t>・「完璧な議事録」より「次に動ける要点」を優先する</a:t>
+              <a:t>・レーンごとに対応方針を決めれば、現場が迷わなくなる</a:t>
             </a:r>
           </a:p>
         </p:txBody>
@@ -4149,7 +4836,7 @@
             <a:avLst/>
           </a:prstGeom>
           <a:solidFill>
-            <a:srgbClr val="1E1711"/>
+            <a:srgbClr val="141414"/>
           </a:solidFill>
           <a:ln>
             <a:noFill/>
@@ -4214,7 +4901,7 @@
                 <a:ea typeface="Hiragino Kaku Gothic Pro"/>
                 <a:cs typeface="Hiragino Kaku Gothic Pro"/>
               </a:rPr>
-              <a:t>新人へ、これだけは</a:t>
+              <a:t>原則① ― その2</a:t>
             </a:r>
           </a:p>
         </p:txBody>
@@ -4247,7 +4934,7 @@
               </a:spcAft>
             </a:pPr>
             <a:r>
-              <a:rPr sz="3400" b="1">
+              <a:rPr sz="3800" b="1">
                 <a:solidFill>
                   <a:srgbClr val="F5F3F0"/>
                 </a:solidFill>
@@ -4255,7 +4942,7 @@
                 <a:ea typeface="Hiragino Kaku Gothic Pro"/>
                 <a:cs typeface="Hiragino Kaku Gothic Pro"/>
               </a:rPr>
-              <a:t>会議の成果は「議事録」ではなく「次に動ける状態」</a:t>
+              <a:t>さらに「階層」で段階に分ける</a:t>
             </a:r>
           </a:p>
         </p:txBody>
@@ -4268,7 +4955,7 @@
         </p:nvSpPr>
         <p:spPr>
           <a:xfrm>
-            <a:off x="914400" y="3108960"/>
+            <a:off x="914400" y="3017520"/>
             <a:ext cx="10424160" cy="3291840"/>
           </a:xfrm>
           <a:prstGeom prst="rect">
@@ -4296,7 +4983,7 @@
                 <a:ea typeface="Hiragino Kaku Gothic Pro"/>
                 <a:cs typeface="Hiragino Kaku Gothic Pro"/>
               </a:rPr>
-              <a:t>・出て終わりにしない。翌日の意思決定を作る</a:t>
+              <a:t>・レポートの入力を、3つの階層に分けた</a:t>
             </a:r>
           </a:p>
           <a:p>
@@ -4314,7 +5001,7 @@
                 <a:ea typeface="Hiragino Kaku Gothic Pro"/>
                 <a:cs typeface="Hiragino Kaku Gothic Pro"/>
               </a:rPr>
-              <a:t>・曖昧な業務は、レーン・階層に分けて構造化する</a:t>
+              <a:t>・自動入力（迷わず決まる）／ 選択・定型文（選べば済む）／ 自由記載（判断が要る）</a:t>
             </a:r>
           </a:p>
           <a:p>
@@ -4332,7 +5019,670 @@
                 <a:ea typeface="Hiragino Kaku Gothic Pro"/>
                 <a:cs typeface="Hiragino Kaku Gothic Pro"/>
               </a:rPr>
-              <a:t>・決定・未決・次アクションを分けて、その日に共有する</a:t>
+              <a:t>・「全部を自由記載にしない」ことで、入力が速く・揺れなくなる</a:t>
+            </a:r>
+          </a:p>
+        </p:txBody>
+      </p:sp>
+    </p:spTree>
+  </p:cSld>
+  <p:clrMapOvr>
+    <a:masterClrMapping/>
+  </p:clrMapOvr>
+</p:sld>
+</file>
+
+<file path=ppt/slides/slide7.xml><?xml version="1.0" encoding="utf-8"?>
+<p:sld xmlns:a="http://schemas.openxmlformats.org/drawingml/2006/main" xmlns:p="http://schemas.openxmlformats.org/presentationml/2006/main" xmlns:r="http://schemas.openxmlformats.org/officeDocument/2006/relationships">
+  <p:cSld>
+    <p:spTree>
+      <p:nvGrpSpPr>
+        <p:cNvPr id="1" name=""/>
+        <p:cNvGrpSpPr/>
+        <p:nvPr/>
+      </p:nvGrpSpPr>
+      <p:grpSpPr/>
+      <p:sp>
+        <p:nvSpPr>
+          <p:cNvPr id="2" name="Rectangle 1"/>
+          <p:cNvSpPr/>
+          <p:nvPr/>
+        </p:nvSpPr>
+        <p:spPr>
+          <a:xfrm>
+            <a:off x="0" y="0"/>
+            <a:ext cx="12191695" cy="6858000"/>
+          </a:xfrm>
+          <a:prstGeom prst="rect">
+            <a:avLst/>
+          </a:prstGeom>
+          <a:solidFill>
+            <a:srgbClr val="141414"/>
+          </a:solidFill>
+          <a:ln>
+            <a:noFill/>
+          </a:ln>
+          <a:effectLst/>
+        </p:spPr>
+        <p:style>
+          <a:lnRef idx="1">
+            <a:schemeClr val="accent1"/>
+          </a:lnRef>
+          <a:fillRef idx="3">
+            <a:schemeClr val="accent1"/>
+          </a:fillRef>
+          <a:effectRef idx="2">
+            <a:schemeClr val="accent1"/>
+          </a:effectRef>
+          <a:fontRef idx="minor">
+            <a:schemeClr val="lt1"/>
+          </a:fontRef>
+        </p:style>
+        <p:txBody>
+          <a:bodyPr rtlCol="0" anchor="ctr"/>
+          <a:lstStyle/>
+          <a:p>
+            <a:pPr algn="ctr"/>
+          </a:p>
+        </p:txBody>
+      </p:sp>
+      <p:sp>
+        <p:nvSpPr>
+          <p:cNvPr id="3" name="TextBox 2"/>
+          <p:cNvSpPr txBox="1"/>
+          <p:nvPr/>
+        </p:nvSpPr>
+        <p:spPr>
+          <a:xfrm>
+            <a:off x="822960" y="640080"/>
+            <a:ext cx="7315200" cy="548640"/>
+          </a:xfrm>
+          <a:prstGeom prst="rect">
+            <a:avLst/>
+          </a:prstGeom>
+          <a:noFill/>
+        </p:spPr>
+        <p:txBody>
+          <a:bodyPr wrap="square">
+            <a:spAutoFit/>
+          </a:bodyPr>
+          <a:lstStyle/>
+          <a:p>
+            <a:pPr algn="l">
+              <a:spcAft>
+                <a:spcPts val="800"/>
+              </a:spcAft>
+            </a:pPr>
+            <a:r>
+              <a:rPr sz="2000" b="1">
+                <a:solidFill>
+                  <a:srgbClr val="E87A3E"/>
+                </a:solidFill>
+                <a:latin typeface="Hiragino Kaku Gothic Pro"/>
+                <a:ea typeface="Hiragino Kaku Gothic Pro"/>
+                <a:cs typeface="Hiragino Kaku Gothic Pro"/>
+              </a:rPr>
+              <a:t>原則① まとめ</a:t>
+            </a:r>
+          </a:p>
+        </p:txBody>
+      </p:sp>
+      <p:sp>
+        <p:nvSpPr>
+          <p:cNvPr id="4" name="TextBox 3"/>
+          <p:cNvSpPr txBox="1"/>
+          <p:nvPr/>
+        </p:nvSpPr>
+        <p:spPr>
+          <a:xfrm>
+            <a:off x="822960" y="1280160"/>
+            <a:ext cx="10607040" cy="1645920"/>
+          </a:xfrm>
+          <a:prstGeom prst="rect">
+            <a:avLst/>
+          </a:prstGeom>
+          <a:noFill/>
+        </p:spPr>
+        <p:txBody>
+          <a:bodyPr wrap="square">
+            <a:spAutoFit/>
+          </a:bodyPr>
+          <a:lstStyle/>
+          <a:p>
+            <a:pPr algn="l">
+              <a:spcAft>
+                <a:spcPts val="800"/>
+              </a:spcAft>
+            </a:pPr>
+            <a:r>
+              <a:rPr sz="3800" b="1">
+                <a:solidFill>
+                  <a:srgbClr val="F5F3F0"/>
+                </a:solidFill>
+                <a:latin typeface="Hiragino Kaku Gothic Pro"/>
+                <a:ea typeface="Hiragino Kaku Gothic Pro"/>
+                <a:cs typeface="Hiragino Kaku Gothic Pro"/>
+              </a:rPr>
+              <a:t>レーン＝分類、階層＝段階</a:t>
+            </a:r>
+          </a:p>
+        </p:txBody>
+      </p:sp>
+      <p:sp>
+        <p:nvSpPr>
+          <p:cNvPr id="5" name="TextBox 4"/>
+          <p:cNvSpPr txBox="1"/>
+          <p:nvPr/>
+        </p:nvSpPr>
+        <p:spPr>
+          <a:xfrm>
+            <a:off x="914400" y="3017520"/>
+            <a:ext cx="10424160" cy="3291840"/>
+          </a:xfrm>
+          <a:prstGeom prst="rect">
+            <a:avLst/>
+          </a:prstGeom>
+          <a:noFill/>
+        </p:spPr>
+        <p:txBody>
+          <a:bodyPr wrap="square">
+            <a:spAutoFit/>
+          </a:bodyPr>
+          <a:lstStyle/>
+          <a:p>
+            <a:pPr algn="l">
+              <a:spcAft>
+                <a:spcPts val="1400"/>
+              </a:spcAft>
+            </a:pPr>
+            <a:r>
+              <a:rPr sz="2300" b="0">
+                <a:solidFill>
+                  <a:srgbClr val="F5F3F0"/>
+                </a:solidFill>
+                <a:latin typeface="Hiragino Kaku Gothic Pro"/>
+                <a:ea typeface="Hiragino Kaku Gothic Pro"/>
+                <a:cs typeface="Hiragino Kaku Gothic Pro"/>
+              </a:rPr>
+              <a:t>・曖昧なものは、「分類（レーン）」か「段階（階層）」に分けると決まる</a:t>
+            </a:r>
+          </a:p>
+          <a:p>
+            <a:pPr algn="l">
+              <a:spcAft>
+                <a:spcPts val="1400"/>
+              </a:spcAft>
+            </a:pPr>
+            <a:r>
+              <a:rPr sz="2300" b="0">
+                <a:solidFill>
+                  <a:srgbClr val="F5F3F0"/>
+                </a:solidFill>
+                <a:latin typeface="Hiragino Kaku Gothic Pro"/>
+                <a:ea typeface="Hiragino Kaku Gothic Pro"/>
+                <a:cs typeface="Hiragino Kaku Gothic Pro"/>
+              </a:rPr>
+              <a:t>・先に「どう分けるか」を決めると、議論が一気に進む</a:t>
+            </a:r>
+          </a:p>
+        </p:txBody>
+      </p:sp>
+    </p:spTree>
+  </p:cSld>
+  <p:clrMapOvr>
+    <a:masterClrMapping/>
+  </p:clrMapOvr>
+</p:sld>
+</file>
+
+<file path=ppt/slides/slide8.xml><?xml version="1.0" encoding="utf-8"?>
+<p:sld xmlns:a="http://schemas.openxmlformats.org/drawingml/2006/main" xmlns:p="http://schemas.openxmlformats.org/presentationml/2006/main" xmlns:r="http://schemas.openxmlformats.org/officeDocument/2006/relationships">
+  <p:cSld>
+    <p:spTree>
+      <p:nvGrpSpPr>
+        <p:cNvPr id="1" name=""/>
+        <p:cNvGrpSpPr/>
+        <p:nvPr/>
+      </p:nvGrpSpPr>
+      <p:grpSpPr/>
+      <p:sp>
+        <p:nvSpPr>
+          <p:cNvPr id="2" name="Rectangle 1"/>
+          <p:cNvSpPr/>
+          <p:nvPr/>
+        </p:nvSpPr>
+        <p:spPr>
+          <a:xfrm>
+            <a:off x="0" y="0"/>
+            <a:ext cx="12191695" cy="6858000"/>
+          </a:xfrm>
+          <a:prstGeom prst="rect">
+            <a:avLst/>
+          </a:prstGeom>
+          <a:solidFill>
+            <a:srgbClr val="141414"/>
+          </a:solidFill>
+          <a:ln>
+            <a:noFill/>
+          </a:ln>
+          <a:effectLst/>
+        </p:spPr>
+        <p:style>
+          <a:lnRef idx="1">
+            <a:schemeClr val="accent1"/>
+          </a:lnRef>
+          <a:fillRef idx="3">
+            <a:schemeClr val="accent1"/>
+          </a:fillRef>
+          <a:effectRef idx="2">
+            <a:schemeClr val="accent1"/>
+          </a:effectRef>
+          <a:fontRef idx="minor">
+            <a:schemeClr val="lt1"/>
+          </a:fontRef>
+        </p:style>
+        <p:txBody>
+          <a:bodyPr rtlCol="0" anchor="ctr"/>
+          <a:lstStyle/>
+          <a:p>
+            <a:pPr algn="ctr"/>
+          </a:p>
+        </p:txBody>
+      </p:sp>
+      <p:sp>
+        <p:nvSpPr>
+          <p:cNvPr id="3" name="TextBox 2"/>
+          <p:cNvSpPr txBox="1"/>
+          <p:nvPr/>
+        </p:nvSpPr>
+        <p:spPr>
+          <a:xfrm>
+            <a:off x="822960" y="640080"/>
+            <a:ext cx="7315200" cy="548640"/>
+          </a:xfrm>
+          <a:prstGeom prst="rect">
+            <a:avLst/>
+          </a:prstGeom>
+          <a:noFill/>
+        </p:spPr>
+        <p:txBody>
+          <a:bodyPr wrap="square">
+            <a:spAutoFit/>
+          </a:bodyPr>
+          <a:lstStyle/>
+          <a:p>
+            <a:pPr algn="l">
+              <a:spcAft>
+                <a:spcPts val="800"/>
+              </a:spcAft>
+            </a:pPr>
+            <a:r>
+              <a:rPr sz="2000" b="1">
+                <a:solidFill>
+                  <a:srgbClr val="E87A3E"/>
+                </a:solidFill>
+                <a:latin typeface="Hiragino Kaku Gothic Pro"/>
+                <a:ea typeface="Hiragino Kaku Gothic Pro"/>
+                <a:cs typeface="Hiragino Kaku Gothic Pro"/>
+              </a:rPr>
+              <a:t>原則②</a:t>
+            </a:r>
+          </a:p>
+        </p:txBody>
+      </p:sp>
+      <p:sp>
+        <p:nvSpPr>
+          <p:cNvPr id="4" name="TextBox 3"/>
+          <p:cNvSpPr txBox="1"/>
+          <p:nvPr/>
+        </p:nvSpPr>
+        <p:spPr>
+          <a:xfrm>
+            <a:off x="822960" y="1280160"/>
+            <a:ext cx="10607040" cy="1645920"/>
+          </a:xfrm>
+          <a:prstGeom prst="rect">
+            <a:avLst/>
+          </a:prstGeom>
+          <a:noFill/>
+        </p:spPr>
+        <p:txBody>
+          <a:bodyPr wrap="square">
+            <a:spAutoFit/>
+          </a:bodyPr>
+          <a:lstStyle/>
+          <a:p>
+            <a:pPr algn="l">
+              <a:spcAft>
+                <a:spcPts val="800"/>
+              </a:spcAft>
+            </a:pPr>
+            <a:r>
+              <a:rPr sz="3800" b="1">
+                <a:solidFill>
+                  <a:srgbClr val="F5F3F0"/>
+                </a:solidFill>
+                <a:latin typeface="Hiragino Kaku Gothic Pro"/>
+                <a:ea typeface="Hiragino Kaku Gothic Pro"/>
+                <a:cs typeface="Hiragino Kaku Gothic Pro"/>
+              </a:rPr>
+              <a:t>決定・未決・次アクションを、分ける</a:t>
+            </a:r>
+          </a:p>
+        </p:txBody>
+      </p:sp>
+      <p:sp>
+        <p:nvSpPr>
+          <p:cNvPr id="5" name="TextBox 4"/>
+          <p:cNvSpPr txBox="1"/>
+          <p:nvPr/>
+        </p:nvSpPr>
+        <p:spPr>
+          <a:xfrm>
+            <a:off x="914400" y="3017520"/>
+            <a:ext cx="10424160" cy="3291840"/>
+          </a:xfrm>
+          <a:prstGeom prst="rect">
+            <a:avLst/>
+          </a:prstGeom>
+          <a:noFill/>
+        </p:spPr>
+        <p:txBody>
+          <a:bodyPr wrap="square">
+            <a:spAutoFit/>
+          </a:bodyPr>
+          <a:lstStyle/>
+          <a:p>
+            <a:pPr algn="l">
+              <a:spcAft>
+                <a:spcPts val="1400"/>
+              </a:spcAft>
+            </a:pPr>
+            <a:r>
+              <a:rPr sz="2300" b="0">
+                <a:solidFill>
+                  <a:srgbClr val="F5F3F0"/>
+                </a:solidFill>
+                <a:latin typeface="Hiragino Kaku Gothic Pro"/>
+                <a:ea typeface="Hiragino Kaku Gothic Pro"/>
+                <a:cs typeface="Hiragino Kaku Gothic Pro"/>
+              </a:rPr>
+              <a:t>・決定 … もう動かしていいこと</a:t>
+            </a:r>
+          </a:p>
+          <a:p>
+            <a:pPr algn="l">
+              <a:spcAft>
+                <a:spcPts val="1400"/>
+              </a:spcAft>
+            </a:pPr>
+            <a:r>
+              <a:rPr sz="2300" b="0">
+                <a:solidFill>
+                  <a:srgbClr val="F5F3F0"/>
+                </a:solidFill>
+                <a:latin typeface="Hiragino Kaku Gothic Pro"/>
+                <a:ea typeface="Hiragino Kaku Gothic Pro"/>
+                <a:cs typeface="Hiragino Kaku Gothic Pro"/>
+              </a:rPr>
+              <a:t>・未決 … 誰が・いつまでに決めるか</a:t>
+            </a:r>
+          </a:p>
+          <a:p>
+            <a:pPr algn="l">
+              <a:spcAft>
+                <a:spcPts val="1400"/>
+              </a:spcAft>
+            </a:pPr>
+            <a:r>
+              <a:rPr sz="2300" b="0">
+                <a:solidFill>
+                  <a:srgbClr val="F5F3F0"/>
+                </a:solidFill>
+                <a:latin typeface="Hiragino Kaku Gothic Pro"/>
+                <a:ea typeface="Hiragino Kaku Gothic Pro"/>
+                <a:cs typeface="Hiragino Kaku Gothic Pro"/>
+              </a:rPr>
+              <a:t>・次アクション … 誰が・何をやるか</a:t>
+            </a:r>
+          </a:p>
+          <a:p>
+            <a:pPr algn="l">
+              <a:spcAft>
+                <a:spcPts val="1400"/>
+              </a:spcAft>
+            </a:pPr>
+            <a:r>
+              <a:rPr sz="2300" b="0">
+                <a:solidFill>
+                  <a:srgbClr val="F5F3F0"/>
+                </a:solidFill>
+                <a:latin typeface="Hiragino Kaku Gothic Pro"/>
+                <a:ea typeface="Hiragino Kaku Gothic Pro"/>
+                <a:cs typeface="Hiragino Kaku Gothic Pro"/>
+              </a:rPr>
+              <a:t>・ぜんぶ混ざった議事録にしない</a:t>
+            </a:r>
+          </a:p>
+        </p:txBody>
+      </p:sp>
+    </p:spTree>
+  </p:cSld>
+  <p:clrMapOvr>
+    <a:masterClrMapping/>
+  </p:clrMapOvr>
+</p:sld>
+</file>
+
+<file path=ppt/slides/slide9.xml><?xml version="1.0" encoding="utf-8"?>
+<p:sld xmlns:a="http://schemas.openxmlformats.org/drawingml/2006/main" xmlns:p="http://schemas.openxmlformats.org/presentationml/2006/main" xmlns:r="http://schemas.openxmlformats.org/officeDocument/2006/relationships">
+  <p:cSld>
+    <p:spTree>
+      <p:nvGrpSpPr>
+        <p:cNvPr id="1" name=""/>
+        <p:cNvGrpSpPr/>
+        <p:nvPr/>
+      </p:nvGrpSpPr>
+      <p:grpSpPr/>
+      <p:sp>
+        <p:nvSpPr>
+          <p:cNvPr id="2" name="Rectangle 1"/>
+          <p:cNvSpPr/>
+          <p:nvPr/>
+        </p:nvSpPr>
+        <p:spPr>
+          <a:xfrm>
+            <a:off x="0" y="0"/>
+            <a:ext cx="12191695" cy="6858000"/>
+          </a:xfrm>
+          <a:prstGeom prst="rect">
+            <a:avLst/>
+          </a:prstGeom>
+          <a:solidFill>
+            <a:srgbClr val="141414"/>
+          </a:solidFill>
+          <a:ln>
+            <a:noFill/>
+          </a:ln>
+          <a:effectLst/>
+        </p:spPr>
+        <p:style>
+          <a:lnRef idx="1">
+            <a:schemeClr val="accent1"/>
+          </a:lnRef>
+          <a:fillRef idx="3">
+            <a:schemeClr val="accent1"/>
+          </a:fillRef>
+          <a:effectRef idx="2">
+            <a:schemeClr val="accent1"/>
+          </a:effectRef>
+          <a:fontRef idx="minor">
+            <a:schemeClr val="lt1"/>
+          </a:fontRef>
+        </p:style>
+        <p:txBody>
+          <a:bodyPr rtlCol="0" anchor="ctr"/>
+          <a:lstStyle/>
+          <a:p>
+            <a:pPr algn="ctr"/>
+          </a:p>
+        </p:txBody>
+      </p:sp>
+      <p:sp>
+        <p:nvSpPr>
+          <p:cNvPr id="3" name="TextBox 2"/>
+          <p:cNvSpPr txBox="1"/>
+          <p:nvPr/>
+        </p:nvSpPr>
+        <p:spPr>
+          <a:xfrm>
+            <a:off x="822960" y="640080"/>
+            <a:ext cx="7315200" cy="548640"/>
+          </a:xfrm>
+          <a:prstGeom prst="rect">
+            <a:avLst/>
+          </a:prstGeom>
+          <a:noFill/>
+        </p:spPr>
+        <p:txBody>
+          <a:bodyPr wrap="square">
+            <a:spAutoFit/>
+          </a:bodyPr>
+          <a:lstStyle/>
+          <a:p>
+            <a:pPr algn="l">
+              <a:spcAft>
+                <a:spcPts val="800"/>
+              </a:spcAft>
+            </a:pPr>
+            <a:r>
+              <a:rPr sz="2000" b="1">
+                <a:solidFill>
+                  <a:srgbClr val="E87A3E"/>
+                </a:solidFill>
+                <a:latin typeface="Hiragino Kaku Gothic Pro"/>
+                <a:ea typeface="Hiragino Kaku Gothic Pro"/>
+                <a:cs typeface="Hiragino Kaku Gothic Pro"/>
+              </a:rPr>
+              <a:t>原則②</a:t>
+            </a:r>
+          </a:p>
+        </p:txBody>
+      </p:sp>
+      <p:sp>
+        <p:nvSpPr>
+          <p:cNvPr id="4" name="TextBox 3"/>
+          <p:cNvSpPr txBox="1"/>
+          <p:nvPr/>
+        </p:nvSpPr>
+        <p:spPr>
+          <a:xfrm>
+            <a:off x="822960" y="1280160"/>
+            <a:ext cx="10607040" cy="1645920"/>
+          </a:xfrm>
+          <a:prstGeom prst="rect">
+            <a:avLst/>
+          </a:prstGeom>
+          <a:noFill/>
+        </p:spPr>
+        <p:txBody>
+          <a:bodyPr wrap="square">
+            <a:spAutoFit/>
+          </a:bodyPr>
+          <a:lstStyle/>
+          <a:p>
+            <a:pPr algn="l">
+              <a:spcAft>
+                <a:spcPts val="800"/>
+              </a:spcAft>
+            </a:pPr>
+            <a:r>
+              <a:rPr sz="3800" b="1">
+                <a:solidFill>
+                  <a:srgbClr val="F5F3F0"/>
+                </a:solidFill>
+                <a:latin typeface="Hiragino Kaku Gothic Pro"/>
+                <a:ea typeface="Hiragino Kaku Gothic Pro"/>
+                <a:cs typeface="Hiragino Kaku Gothic Pro"/>
+              </a:rPr>
+              <a:t>そして、その日のうちに共有する</a:t>
+            </a:r>
+          </a:p>
+        </p:txBody>
+      </p:sp>
+      <p:sp>
+        <p:nvSpPr>
+          <p:cNvPr id="5" name="TextBox 4"/>
+          <p:cNvSpPr txBox="1"/>
+          <p:nvPr/>
+        </p:nvSpPr>
+        <p:spPr>
+          <a:xfrm>
+            <a:off x="914400" y="3017520"/>
+            <a:ext cx="10424160" cy="3291840"/>
+          </a:xfrm>
+          <a:prstGeom prst="rect">
+            <a:avLst/>
+          </a:prstGeom>
+          <a:noFill/>
+        </p:spPr>
+        <p:txBody>
+          <a:bodyPr wrap="square">
+            <a:spAutoFit/>
+          </a:bodyPr>
+          <a:lstStyle/>
+          <a:p>
+            <a:pPr algn="l">
+              <a:spcAft>
+                <a:spcPts val="1400"/>
+              </a:spcAft>
+            </a:pPr>
+            <a:r>
+              <a:rPr sz="2300" b="0">
+                <a:solidFill>
+                  <a:srgbClr val="F5F3F0"/>
+                </a:solidFill>
+                <a:latin typeface="Hiragino Kaku Gothic Pro"/>
+                <a:ea typeface="Hiragino Kaku Gothic Pro"/>
+                <a:cs typeface="Hiragino Kaku Gothic Pro"/>
+              </a:rPr>
+              <a:t>・鮮度が価値。翌日には記憶も熱量も薄れる</a:t>
+            </a:r>
+          </a:p>
+          <a:p>
+            <a:pPr algn="l">
+              <a:spcAft>
+                <a:spcPts val="1400"/>
+              </a:spcAft>
+            </a:pPr>
+            <a:r>
+              <a:rPr sz="2300" b="0">
+                <a:solidFill>
+                  <a:srgbClr val="F5F3F0"/>
+                </a:solidFill>
+                <a:latin typeface="Hiragino Kaku Gothic Pro"/>
+                <a:ea typeface="Hiragino Kaku Gothic Pro"/>
+                <a:cs typeface="Hiragino Kaku Gothic Pro"/>
+              </a:rPr>
+              <a:t>・完璧な議事録より、「動ける1枚」を先に出す</a:t>
+            </a:r>
+          </a:p>
+          <a:p>
+            <a:pPr algn="l">
+              <a:spcAft>
+                <a:spcPts val="1400"/>
+              </a:spcAft>
+            </a:pPr>
+            <a:r>
+              <a:rPr sz="2300" b="0">
+                <a:solidFill>
+                  <a:srgbClr val="F5F3F0"/>
+                </a:solidFill>
+                <a:latin typeface="Hiragino Kaku Gothic Pro"/>
+                <a:ea typeface="Hiragino Kaku Gothic Pro"/>
+                <a:cs typeface="Hiragino Kaku Gothic Pro"/>
+              </a:rPr>
+              <a:t>・未決は宙ぶらりんにせず、必ず担当と期限をつける</a:t>
             </a:r>
           </a:p>
         </p:txBody>
